--- a/docs/2D게임프로그래밍_2차 프로젝트 발표.pptx
+++ b/docs/2D게임프로그래밍_2차 프로젝트 발표.pptx
@@ -7,7 +7,8 @@
   <p:sldIdLst>
     <p:sldId id="256" r:id="rId2"/>
     <p:sldId id="257" r:id="rId3"/>
-    <p:sldId id="258" r:id="rId4"/>
+    <p:sldId id="259" r:id="rId4"/>
+    <p:sldId id="258" r:id="rId5"/>
   </p:sldIdLst>
   <p:sldSz cx="12192000" cy="6858000"/>
   <p:notesSz cx="6858000" cy="9144000"/>
@@ -3288,12 +3289,19 @@
   </p:clrMapOvr>
   <mc:AlternateContent xmlns:mc="http://schemas.openxmlformats.org/markup-compatibility/2006">
     <mc:Choice xmlns:p14="http://schemas.microsoft.com/office/powerpoint/2010/main" Requires="p14">
-      <p:transition xmlns:mc="http://schemas.openxmlformats.org/markup-compatibility/2006" xmlns:p14="http://schemas.microsoft.com/office/powerpoint/2010/main" mc:Ignorable="p14" p14:dur="500"/>
+      <p:transition xmlns:mc="http://schemas.openxmlformats.org/markup-compatibility/2006" xmlns:p14="http://schemas.microsoft.com/office/powerpoint/2010/main" advTm="4172" mc:Ignorable="p14" p14:dur="500"/>
     </mc:Choice>
     <mc:Fallback>
       <p:transition/>
     </mc:Fallback>
   </mc:AlternateContent>
+  <p:timing>
+    <p:tnLst>
+      <p:par>
+        <p:cTn id="1" dur="indefinite" restart="never" nodeType="tmRoot"/>
+      </p:par>
+    </p:tnLst>
+  </p:timing>
 </p:sld>
 </file>
 
@@ -3314,56 +3322,912 @@
           <a:chExt cx="0" cy="0"/>
         </a:xfrm>
       </p:grpSpPr>
-      <p:sp>
-        <p:nvSpPr>
-          <p:cNvPr id="2" name="제목 1"/>
-          <p:cNvSpPr>
-            <a:spLocks noGrp="1"/>
-          </p:cNvSpPr>
-          <p:nvPr>
-            <p:ph type="title" idx="0"/>
-          </p:nvPr>
-        </p:nvSpPr>
-        <p:spPr/>
-        <p:txBody>
-          <a:bodyPr/>
+      <p:cxnSp>
+        <p:nvCxnSpPr>
+          <p:cNvPr id="7" name=""/>
+          <p:cNvCxnSpPr/>
+          <p:nvPr/>
+        </p:nvCxnSpPr>
+        <p:spPr>
+          <a:xfrm>
+            <a:off x="9020968" y="1943616"/>
+            <a:ext cx="500062" cy="0"/>
+          </a:xfrm>
+          <a:prstGeom prst="straightConnector1">
+            <a:avLst/>
+          </a:prstGeom>
+          <a:ln>
+            <a:solidFill>
+              <a:schemeClr val="dk1"/>
+            </a:solidFill>
+            <a:tailEnd type="arrow"/>
+          </a:ln>
+        </p:spPr>
+        <p:style>
+          <a:lnRef idx="1">
+            <a:schemeClr val="accent1"/>
+          </a:lnRef>
+          <a:fillRef idx="0">
+            <a:schemeClr val="accent1"/>
+          </a:fillRef>
+          <a:effectRef idx="0">
+            <a:schemeClr val="accent1"/>
+          </a:effectRef>
+          <a:fontRef idx="minor">
+            <a:schemeClr val="tx1"/>
+          </a:fontRef>
+        </p:style>
+      </p:cxnSp>
+      <p:sp>
+        <p:nvSpPr>
+          <p:cNvPr id="8" name=""/>
+          <p:cNvSpPr txBox="1"/>
+          <p:nvPr/>
+        </p:nvSpPr>
+        <p:spPr>
+          <a:xfrm>
+            <a:off x="9521030" y="1761807"/>
+            <a:ext cx="827483" cy="366832"/>
+          </a:xfrm>
+          <a:prstGeom prst="rect">
+            <a:avLst/>
+          </a:prstGeom>
+        </p:spPr>
+        <p:txBody>
+          <a:bodyPr wrap="square">
+            <a:spAutoFit/>
+          </a:bodyPr>
           <a:p>
             <a:pPr>
               <a:defRPr/>
             </a:pPr>
             <a:r>
-              <a:rPr lang="ko-KR" altLang="en-US"/>
-              <a:t/>
-            </a:r>
-            <a:endParaRPr lang="ko-KR" altLang="en-US"/>
-          </a:p>
-        </p:txBody>
-      </p:sp>
-      <p:sp>
-        <p:nvSpPr>
-          <p:cNvPr id="3" name="내용 개체 틀 2"/>
-          <p:cNvSpPr>
-            <a:spLocks noGrp="1"/>
-          </p:cNvSpPr>
-          <p:nvPr>
-            <p:ph idx="1"/>
-          </p:nvPr>
-        </p:nvSpPr>
-        <p:spPr/>
-        <p:txBody>
-          <a:bodyPr/>
-          <a:p>
-            <a:pPr>
+              <a:rPr lang="en-US" altLang="ko-KR"/>
+              <a:t>100%</a:t>
+            </a:r>
+            <a:endParaRPr lang="en-US" altLang="ko-KR"/>
+          </a:p>
+        </p:txBody>
+      </p:sp>
+      <p:cxnSp>
+        <p:nvCxnSpPr>
+          <p:cNvPr id="9" name=""/>
+          <p:cNvCxnSpPr/>
+          <p:nvPr/>
+        </p:nvCxnSpPr>
+        <p:spPr>
+          <a:xfrm>
+            <a:off x="9020970" y="2310448"/>
+            <a:ext cx="500062" cy="0"/>
+          </a:xfrm>
+          <a:prstGeom prst="straightConnector1">
+            <a:avLst/>
+          </a:prstGeom>
+          <a:noFill/>
+          <a:ln w="12700" cap="flat" cmpd="sng" algn="ctr">
+            <a:solidFill>
+              <a:srgbClr val="000000">
+                <a:alpha val="100000"/>
+              </a:srgbClr>
+            </a:solidFill>
+            <a:prstDash val="solid"/>
+            <a:tailEnd type="arrow"/>
+          </a:ln>
+        </p:spPr>
+      </p:cxnSp>
+      <p:sp>
+        <p:nvSpPr>
+          <p:cNvPr id="10" name=""/>
+          <p:cNvSpPr txBox="1"/>
+          <p:nvPr/>
+        </p:nvSpPr>
+        <p:spPr>
+          <a:xfrm>
+            <a:off x="9521032" y="2128639"/>
+            <a:ext cx="827483" cy="366832"/>
+          </a:xfrm>
+          <a:prstGeom prst="rect">
+            <a:avLst/>
+          </a:prstGeom>
+        </p:spPr>
+        <p:txBody>
+          <a:bodyPr wrap="square">
+            <a:spAutoFit/>
+          </a:bodyPr>
+          <a:p>
+            <a:pPr marL="0" indent="0" algn="l" defTabSz="914400" rtl="0" eaLnBrk="1" latinLnBrk="1" hangingPunct="1">
+              <a:lnSpc>
+                <a:spcPct val="100000"/>
+              </a:lnSpc>
+              <a:spcBef>
+                <a:spcPct val="0"/>
+              </a:spcBef>
+              <a:spcAft>
+                <a:spcPts val="0"/>
+              </a:spcAft>
+              <a:buNone/>
               <a:defRPr/>
             </a:pPr>
             <a:r>
-              <a:rPr lang="ko-KR" altLang="en-US"/>
-              <a:t/>
-            </a:r>
-            <a:endParaRPr lang="ko-KR" altLang="en-US"/>
-          </a:p>
-        </p:txBody>
-      </p:sp>
+              <a:rPr xmlns:mc="http://schemas.openxmlformats.org/markup-compatibility/2006" xmlns:hp="http://schemas.haansoft.com/office/presentation/8.0" kumimoji="0" lang="en-US" altLang="ko-KR" sz="1800" b="0" i="0" u="none" strike="noStrike" kern="1200" cap="none" spc="0" normalizeH="0" baseline="0" mc:Ignorable="hp" hp:hslEmbossed="0">
+                <a:solidFill>
+                  <a:srgbClr val="000000"/>
+                </a:solidFill>
+                <a:latin typeface="Calibri"/>
+                <a:ea typeface="맑은 고딕"/>
+                <a:cs typeface="Calibri"/>
+              </a:rPr>
+              <a:t>100%</a:t>
+            </a:r>
+            <a:endParaRPr xmlns:mc="http://schemas.openxmlformats.org/markup-compatibility/2006" xmlns:hp="http://schemas.haansoft.com/office/presentation/8.0" kumimoji="0" lang="en-US" altLang="ko-KR" sz="1800" b="0" i="0" u="none" strike="noStrike" kern="1200" cap="none" spc="0" normalizeH="0" baseline="0" mc:Ignorable="hp" hp:hslEmbossed="0">
+              <a:solidFill>
+                <a:srgbClr val="000000"/>
+              </a:solidFill>
+              <a:latin typeface="Calibri"/>
+              <a:ea typeface="맑은 고딕"/>
+              <a:cs typeface="Calibri"/>
+            </a:endParaRPr>
+          </a:p>
+        </p:txBody>
+      </p:sp>
+      <p:cxnSp>
+        <p:nvCxnSpPr>
+          <p:cNvPr id="11" name=""/>
+          <p:cNvCxnSpPr/>
+          <p:nvPr/>
+        </p:nvCxnSpPr>
+        <p:spPr>
+          <a:xfrm>
+            <a:off x="9020970" y="2677280"/>
+            <a:ext cx="500062" cy="0"/>
+          </a:xfrm>
+          <a:prstGeom prst="straightConnector1">
+            <a:avLst/>
+          </a:prstGeom>
+          <a:noFill/>
+          <a:ln w="12700" cap="flat" cmpd="sng" algn="ctr">
+            <a:solidFill>
+              <a:srgbClr val="000000">
+                <a:alpha val="100000"/>
+              </a:srgbClr>
+            </a:solidFill>
+            <a:prstDash val="solid"/>
+            <a:tailEnd type="arrow"/>
+          </a:ln>
+        </p:spPr>
+      </p:cxnSp>
+      <p:sp>
+        <p:nvSpPr>
+          <p:cNvPr id="12" name=""/>
+          <p:cNvSpPr txBox="1"/>
+          <p:nvPr/>
+        </p:nvSpPr>
+        <p:spPr>
+          <a:xfrm>
+            <a:off x="9521032" y="2495471"/>
+            <a:ext cx="827483" cy="366832"/>
+          </a:xfrm>
+          <a:prstGeom prst="rect">
+            <a:avLst/>
+          </a:prstGeom>
+        </p:spPr>
+        <p:txBody>
+          <a:bodyPr wrap="square">
+            <a:spAutoFit/>
+          </a:bodyPr>
+          <a:p>
+            <a:pPr marL="0" indent="0" algn="l" defTabSz="914400" rtl="0" eaLnBrk="1" latinLnBrk="1" hangingPunct="1">
+              <a:lnSpc>
+                <a:spcPct val="100000"/>
+              </a:lnSpc>
+              <a:spcBef>
+                <a:spcPct val="0"/>
+              </a:spcBef>
+              <a:spcAft>
+                <a:spcPts val="0"/>
+              </a:spcAft>
+              <a:buNone/>
+              <a:defRPr/>
+            </a:pPr>
+            <a:r>
+              <a:rPr xmlns:mc="http://schemas.openxmlformats.org/markup-compatibility/2006" xmlns:hp="http://schemas.haansoft.com/office/presentation/8.0" kumimoji="0" lang="en-US" altLang="ko-KR" sz="1800" b="0" i="0" u="none" strike="noStrike" kern="1200" cap="none" spc="0" normalizeH="0" baseline="0" mc:Ignorable="hp" hp:hslEmbossed="0">
+                <a:solidFill>
+                  <a:srgbClr val="000000"/>
+                </a:solidFill>
+                <a:latin typeface="Calibri"/>
+                <a:ea typeface="맑은 고딕"/>
+                <a:cs typeface="Calibri"/>
+              </a:rPr>
+              <a:t>30%</a:t>
+            </a:r>
+            <a:endParaRPr xmlns:mc="http://schemas.openxmlformats.org/markup-compatibility/2006" xmlns:hp="http://schemas.haansoft.com/office/presentation/8.0" kumimoji="0" lang="en-US" altLang="ko-KR" sz="1800" b="0" i="0" u="none" strike="noStrike" kern="1200" cap="none" spc="0" normalizeH="0" baseline="0" mc:Ignorable="hp" hp:hslEmbossed="0">
+              <a:solidFill>
+                <a:srgbClr val="000000"/>
+              </a:solidFill>
+              <a:latin typeface="Calibri"/>
+              <a:ea typeface="맑은 고딕"/>
+              <a:cs typeface="Calibri"/>
+            </a:endParaRPr>
+          </a:p>
+        </p:txBody>
+      </p:sp>
+      <p:cxnSp>
+        <p:nvCxnSpPr>
+          <p:cNvPr id="13" name=""/>
+          <p:cNvCxnSpPr/>
+          <p:nvPr/>
+        </p:nvCxnSpPr>
+        <p:spPr>
+          <a:xfrm>
+            <a:off x="9020970" y="3098046"/>
+            <a:ext cx="500062" cy="0"/>
+          </a:xfrm>
+          <a:prstGeom prst="straightConnector1">
+            <a:avLst/>
+          </a:prstGeom>
+          <a:noFill/>
+          <a:ln w="12700" cap="flat" cmpd="sng" algn="ctr">
+            <a:solidFill>
+              <a:srgbClr val="000000">
+                <a:alpha val="100000"/>
+              </a:srgbClr>
+            </a:solidFill>
+            <a:prstDash val="solid"/>
+            <a:tailEnd type="arrow"/>
+          </a:ln>
+        </p:spPr>
+      </p:cxnSp>
+      <p:sp>
+        <p:nvSpPr>
+          <p:cNvPr id="14" name=""/>
+          <p:cNvSpPr txBox="1"/>
+          <p:nvPr/>
+        </p:nvSpPr>
+        <p:spPr>
+          <a:xfrm>
+            <a:off x="9521032" y="2916237"/>
+            <a:ext cx="827483" cy="366832"/>
+          </a:xfrm>
+          <a:prstGeom prst="rect">
+            <a:avLst/>
+          </a:prstGeom>
+        </p:spPr>
+        <p:txBody>
+          <a:bodyPr wrap="square">
+            <a:spAutoFit/>
+          </a:bodyPr>
+          <a:p>
+            <a:pPr marL="0" indent="0" algn="l" defTabSz="914400" rtl="0" eaLnBrk="1" latinLnBrk="1" hangingPunct="1">
+              <a:lnSpc>
+                <a:spcPct val="100000"/>
+              </a:lnSpc>
+              <a:spcBef>
+                <a:spcPct val="0"/>
+              </a:spcBef>
+              <a:spcAft>
+                <a:spcPts val="0"/>
+              </a:spcAft>
+              <a:buNone/>
+              <a:defRPr/>
+            </a:pPr>
+            <a:r>
+              <a:rPr xmlns:mc="http://schemas.openxmlformats.org/markup-compatibility/2006" xmlns:hp="http://schemas.haansoft.com/office/presentation/8.0" kumimoji="0" lang="en-US" altLang="ko-KR" sz="1800" b="0" i="0" u="none" strike="noStrike" kern="1200" cap="none" spc="0" normalizeH="0" baseline="0" mc:Ignorable="hp" hp:hslEmbossed="0">
+                <a:solidFill>
+                  <a:srgbClr val="000000"/>
+                </a:solidFill>
+                <a:latin typeface="Calibri"/>
+                <a:ea typeface="맑은 고딕"/>
+                <a:cs typeface="Calibri"/>
+              </a:rPr>
+              <a:t>0%</a:t>
+            </a:r>
+            <a:endParaRPr xmlns:mc="http://schemas.openxmlformats.org/markup-compatibility/2006" xmlns:hp="http://schemas.haansoft.com/office/presentation/8.0" kumimoji="0" lang="en-US" altLang="ko-KR" sz="1800" b="0" i="0" u="none" strike="noStrike" kern="1200" cap="none" spc="0" normalizeH="0" baseline="0" mc:Ignorable="hp" hp:hslEmbossed="0">
+              <a:solidFill>
+                <a:srgbClr val="000000"/>
+              </a:solidFill>
+              <a:latin typeface="Calibri"/>
+              <a:ea typeface="맑은 고딕"/>
+              <a:cs typeface="Calibri"/>
+            </a:endParaRPr>
+          </a:p>
+        </p:txBody>
+      </p:sp>
+      <p:graphicFrame>
+        <p:nvGraphicFramePr>
+          <p:cNvPr id="15" name=""/>
+          <p:cNvGraphicFramePr>
+            <a:graphicFrameLocks noGrp="1"/>
+          </p:cNvGraphicFramePr>
+          <p:nvPr/>
+        </p:nvGraphicFramePr>
+        <p:xfrm>
+          <a:off x="892969" y="1761807"/>
+          <a:ext cx="8128000" cy="3334385"/>
+        </p:xfrm>
+        <a:graphic>
+          <a:graphicData uri="http://schemas.openxmlformats.org/drawingml/2006/table">
+            <a:tbl>
+              <a:tblPr firstRow="1" bandRow="1">
+                <a:tableStyle styleId="{1F423C0B-24CF-4C3C-8A59-7768EA0501B5}" styleName="Normal Style 1 - Accent 3">
+                  <a:wholeTbl>
+                    <a:tcTxStyle>
+                      <a:fontRef idx="minor">
+                        <a:prstClr val="black"/>
+                      </a:fontRef>
+                      <a:schemeClr val="dk1"/>
+                    </a:tcTxStyle>
+                    <a:tcStyle>
+                      <a:tcBdr>
+                        <a:left>
+                          <a:ln w="12700" cmpd="sng">
+                            <a:solidFill>
+                              <a:schemeClr val="lt1"/>
+                            </a:solidFill>
+                          </a:ln>
+                        </a:left>
+                        <a:right>
+                          <a:ln w="12700" cmpd="sng">
+                            <a:solidFill>
+                              <a:schemeClr val="lt1"/>
+                            </a:solidFill>
+                          </a:ln>
+                        </a:right>
+                        <a:top>
+                          <a:ln w="12700" cmpd="sng">
+                            <a:solidFill>
+                              <a:schemeClr val="lt1"/>
+                            </a:solidFill>
+                          </a:ln>
+                        </a:top>
+                        <a:bottom>
+                          <a:ln w="12700" cmpd="sng">
+                            <a:solidFill>
+                              <a:schemeClr val="lt1"/>
+                            </a:solidFill>
+                          </a:ln>
+                        </a:bottom>
+                        <a:insideH>
+                          <a:ln w="12700" cmpd="sng">
+                            <a:solidFill>
+                              <a:schemeClr val="lt1"/>
+                            </a:solidFill>
+                          </a:ln>
+                        </a:insideH>
+                        <a:insideV>
+                          <a:ln w="12700" cmpd="sng">
+                            <a:solidFill>
+                              <a:schemeClr val="lt1"/>
+                            </a:solidFill>
+                          </a:ln>
+                        </a:insideV>
+                      </a:tcBdr>
+                      <a:fill>
+                        <a:solidFill>
+                          <a:schemeClr val="accent3">
+                            <a:lum val="90000"/>
+                          </a:schemeClr>
+                        </a:solidFill>
+                      </a:fill>
+                    </a:tcStyle>
+                  </a:wholeTbl>
+                  <a:band1H>
+                    <a:tcTxStyle/>
+                    <a:tcStyle>
+                      <a:tcBdr/>
+                      <a:fill>
+                        <a:solidFill>
+                          <a:schemeClr val="accent3">
+                            <a:lum val="80000"/>
+                          </a:schemeClr>
+                        </a:solidFill>
+                      </a:fill>
+                    </a:tcStyle>
+                  </a:band1H>
+                  <a:band2H>
+                    <a:tcTxStyle/>
+                    <a:tcStyle>
+                      <a:tcBdr/>
+                    </a:tcStyle>
+                  </a:band2H>
+                  <a:band1V>
+                    <a:tcTxStyle/>
+                    <a:tcStyle>
+                      <a:tcBdr/>
+                      <a:fill>
+                        <a:solidFill>
+                          <a:schemeClr val="accent3">
+                            <a:lum val="80000"/>
+                          </a:schemeClr>
+                        </a:solidFill>
+                      </a:fill>
+                    </a:tcStyle>
+                  </a:band1V>
+                  <a:band2V>
+                    <a:tcTxStyle/>
+                    <a:tcStyle>
+                      <a:tcBdr/>
+                    </a:tcStyle>
+                  </a:band2V>
+                  <a:lastCol>
+                    <a:tcTxStyle b="on">
+                      <a:fontRef idx="minor">
+                        <a:prstClr val="black"/>
+                      </a:fontRef>
+                      <a:schemeClr val="lt1"/>
+                    </a:tcTxStyle>
+                    <a:tcStyle>
+                      <a:tcBdr/>
+                      <a:fill>
+                        <a:solidFill>
+                          <a:schemeClr val="accent3"/>
+                        </a:solidFill>
+                      </a:fill>
+                    </a:tcStyle>
+                  </a:lastCol>
+                  <a:firstCol>
+                    <a:tcTxStyle b="on">
+                      <a:fontRef idx="minor">
+                        <a:prstClr val="black"/>
+                      </a:fontRef>
+                      <a:schemeClr val="lt1"/>
+                    </a:tcTxStyle>
+                    <a:tcStyle>
+                      <a:tcBdr/>
+                      <a:fill>
+                        <a:solidFill>
+                          <a:schemeClr val="accent3"/>
+                        </a:solidFill>
+                      </a:fill>
+                    </a:tcStyle>
+                  </a:firstCol>
+                  <a:lastRow>
+                    <a:tcTxStyle b="on">
+                      <a:fontRef idx="minor">
+                        <a:prstClr val="black"/>
+                      </a:fontRef>
+                      <a:schemeClr val="lt1"/>
+                    </a:tcTxStyle>
+                    <a:tcStyle>
+                      <a:tcBdr>
+                        <a:top>
+                          <a:ln w="38100" cmpd="sng">
+                            <a:solidFill>
+                              <a:schemeClr val="lt1"/>
+                            </a:solidFill>
+                          </a:ln>
+                        </a:top>
+                      </a:tcBdr>
+                      <a:fill>
+                        <a:solidFill>
+                          <a:schemeClr val="accent3"/>
+                        </a:solidFill>
+                      </a:fill>
+                    </a:tcStyle>
+                  </a:lastRow>
+                  <a:firstRow>
+                    <a:tcTxStyle b="on">
+                      <a:fontRef idx="minor">
+                        <a:prstClr val="black"/>
+                      </a:fontRef>
+                      <a:schemeClr val="lt1"/>
+                    </a:tcTxStyle>
+                    <a:tcStyle>
+                      <a:tcBdr>
+                        <a:bottom>
+                          <a:ln w="38100" cmpd="sng">
+                            <a:solidFill>
+                              <a:schemeClr val="lt1"/>
+                            </a:solidFill>
+                          </a:ln>
+                        </a:bottom>
+                      </a:tcBdr>
+                      <a:fill>
+                        <a:solidFill>
+                          <a:schemeClr val="accent3"/>
+                        </a:solidFill>
+                      </a:fill>
+                    </a:tcStyle>
+                  </a:firstRow>
+                </a:tableStyle>
+              </a:tblPr>
+              <a:tblGrid>
+                <a:gridCol w="980281"/>
+                <a:gridCol w="7147718"/>
+              </a:tblGrid>
+              <a:tr h="116840">
+                <a:tc>
+                  <a:txBody>
+                    <a:bodyPr vert="horz" wrap="square" lIns="91440" tIns="45720" rIns="91440" bIns="45720" anchor="t" anchorCtr="0">
+                      <a:spAutoFit/>
+                    </a:bodyPr>
+                    <a:p>
+                      <a:pPr>
+                        <a:defRPr/>
+                      </a:pPr>
+                      <a:r>
+                        <a:rPr lang="ko-KR" altLang="en-US" b="0">
+                          <a:solidFill>
+                            <a:schemeClr val="tx1"/>
+                          </a:solidFill>
+                        </a:rPr>
+                        <a:t>1주차</a:t>
+                      </a:r>
+                      <a:endParaRPr lang="ko-KR" altLang="en-US" b="0">
+                        <a:solidFill>
+                          <a:schemeClr val="tx1"/>
+                        </a:solidFill>
+                      </a:endParaRPr>
+                    </a:p>
+                  </a:txBody>
+                  <a:tcPr marL="91440" marR="91440"/>
+                </a:tc>
+                <a:tc>
+                  <a:txBody>
+                    <a:bodyPr vert="horz" wrap="square" lIns="91440" tIns="45720" rIns="91440" bIns="45720" anchor="t" anchorCtr="0">
+                      <a:spAutoFit/>
+                    </a:bodyPr>
+                    <a:p>
+                      <a:pPr>
+                        <a:defRPr/>
+                      </a:pPr>
+                      <a:r>
+                        <a:rPr lang="ko-KR" altLang="en-US" b="0">
+                          <a:solidFill>
+                            <a:schemeClr val="tx1"/>
+                          </a:solidFill>
+                        </a:rPr>
+                        <a:t>환경 세팅, 기본 캐릭터/행성 리소스 불러오기</a:t>
+                      </a:r>
+                      <a:endParaRPr lang="ko-KR" altLang="en-US" b="0">
+                        <a:solidFill>
+                          <a:schemeClr val="tx1"/>
+                        </a:solidFill>
+                      </a:endParaRPr>
+                    </a:p>
+                  </a:txBody>
+                  <a:tcPr marL="91440" marR="91440"/>
+                </a:tc>
+              </a:tr>
+              <a:tr h="370840">
+                <a:tc>
+                  <a:txBody>
+                    <a:bodyPr vert="horz" wrap="square" lIns="91440" tIns="45720" rIns="91440" bIns="45720" anchor="t" anchorCtr="0">
+                      <a:spAutoFit/>
+                    </a:bodyPr>
+                    <a:p>
+                      <a:pPr>
+                        <a:defRPr/>
+                      </a:pPr>
+                      <a:r>
+                        <a:rPr lang="en-US" altLang="ko-KR"/>
+                        <a:t>2</a:t>
+                      </a:r>
+                      <a:r>
+                        <a:rPr lang="ko-KR" altLang="en-US"/>
+                        <a:t>주차</a:t>
+                      </a:r>
+                      <a:endParaRPr lang="ko-KR" altLang="en-US"/>
+                    </a:p>
+                  </a:txBody>
+                  <a:tcPr marL="91440" marR="91440"/>
+                </a:tc>
+                <a:tc>
+                  <a:txBody>
+                    <a:bodyPr vert="horz" wrap="square" lIns="91440" tIns="45720" rIns="91440" bIns="45720" anchor="t" anchorCtr="0">
+                      <a:spAutoFit/>
+                    </a:bodyPr>
+                    <a:p>
+                      <a:pPr>
+                        <a:defRPr/>
+                      </a:pPr>
+                      <a:r>
+                        <a:rPr lang="ko-KR" altLang="en-US"/>
+                        <a:t>플레이어 이동, 드릴 공격 구현</a:t>
+                      </a:r>
+                      <a:endParaRPr lang="ko-KR" altLang="en-US"/>
+                    </a:p>
+                  </a:txBody>
+                  <a:tcPr marL="91440" marR="91440"/>
+                </a:tc>
+              </a:tr>
+              <a:tr h="370840">
+                <a:tc>
+                  <a:txBody>
+                    <a:bodyPr vert="horz" wrap="square" lIns="91440" tIns="45720" rIns="91440" bIns="45720" anchor="t" anchorCtr="0">
+                      <a:spAutoFit/>
+                    </a:bodyPr>
+                    <a:p>
+                      <a:pPr>
+                        <a:defRPr/>
+                      </a:pPr>
+                      <a:r>
+                        <a:rPr lang="en-US" altLang="ko-KR"/>
+                        <a:t>3</a:t>
+                      </a:r>
+                      <a:r>
+                        <a:rPr lang="ko-KR" altLang="en-US"/>
+                        <a:t>주차</a:t>
+                      </a:r>
+                      <a:endParaRPr lang="ko-KR" altLang="en-US"/>
+                    </a:p>
+                  </a:txBody>
+                  <a:tcPr marL="91440" marR="91440"/>
+                </a:tc>
+                <a:tc>
+                  <a:txBody>
+                    <a:bodyPr vert="horz" wrap="square" lIns="91440" tIns="45720" rIns="91440" bIns="45720" anchor="t" anchorCtr="0">
+                      <a:spAutoFit/>
+                    </a:bodyPr>
+                    <a:p>
+                      <a:pPr>
+                        <a:defRPr/>
+                      </a:pPr>
+                      <a:r>
+                        <a:rPr lang="ko-KR" altLang="en-US"/>
+                        <a:t>행성 구조(지각-맨틀-외핵-내핵) + 충돌 판정</a:t>
+                      </a:r>
+                      <a:endParaRPr lang="ko-KR" altLang="en-US"/>
+                    </a:p>
+                  </a:txBody>
+                  <a:tcPr marL="91440" marR="91440"/>
+                </a:tc>
+              </a:tr>
+              <a:tr h="370840">
+                <a:tc>
+                  <a:txBody>
+                    <a:bodyPr vert="horz" wrap="square" lIns="91440" tIns="45720" rIns="91440" bIns="45720" anchor="t" anchorCtr="0">
+                      <a:spAutoFit/>
+                    </a:bodyPr>
+                    <a:p>
+                      <a:pPr>
+                        <a:defRPr/>
+                      </a:pPr>
+                      <a:r>
+                        <a:rPr lang="en-US" altLang="ko-KR"/>
+                        <a:t>4</a:t>
+                      </a:r>
+                      <a:r>
+                        <a:rPr lang="ko-KR" altLang="en-US"/>
+                        <a:t>주차</a:t>
+                      </a:r>
+                      <a:endParaRPr lang="en-US" altLang="ko-KR"/>
+                    </a:p>
+                  </a:txBody>
+                  <a:tcPr marL="91440" marR="91440"/>
+                </a:tc>
+                <a:tc>
+                  <a:txBody>
+                    <a:bodyPr vert="horz" wrap="square" lIns="91440" tIns="45720" rIns="91440" bIns="45720" anchor="t" anchorCtr="0">
+                      <a:spAutoFit/>
+                    </a:bodyPr>
+                    <a:p>
+                      <a:pPr>
+                        <a:defRPr/>
+                      </a:pPr>
+                      <a:r>
+                        <a:rPr lang="ko-KR" altLang="en-US"/>
+                        <a:t>광물 채력/가시 데미지 시스템 + 우주선 체력/방어력</a:t>
+                      </a:r>
+                      <a:endParaRPr lang="ko-KR" altLang="en-US"/>
+                    </a:p>
+                  </a:txBody>
+                  <a:tcPr marL="91440" marR="91440"/>
+                </a:tc>
+              </a:tr>
+              <a:tr h="370840">
+                <a:tc>
+                  <a:txBody>
+                    <a:bodyPr vert="horz" wrap="square" lIns="91440" tIns="45720" rIns="91440" bIns="45720" anchor="t" anchorCtr="0">
+                      <a:spAutoFit/>
+                    </a:bodyPr>
+                    <a:p>
+                      <a:pPr>
+                        <a:defRPr/>
+                      </a:pPr>
+                      <a:r>
+                        <a:rPr lang="en-US" altLang="ko-KR"/>
+                        <a:t>5</a:t>
+                      </a:r>
+                      <a:r>
+                        <a:rPr lang="ko-KR" altLang="en-US"/>
+                        <a:t>주차</a:t>
+                      </a:r>
+                      <a:endParaRPr lang="en-US" altLang="ko-KR"/>
+                    </a:p>
+                  </a:txBody>
+                  <a:tcPr marL="91440" marR="91440"/>
+                </a:tc>
+                <a:tc>
+                  <a:txBody>
+                    <a:bodyPr vert="horz" wrap="square" lIns="91440" tIns="45720" rIns="91440" bIns="45720" anchor="t" anchorCtr="0">
+                      <a:spAutoFit/>
+                    </a:bodyPr>
+                    <a:p>
+                      <a:pPr>
+                        <a:defRPr/>
+                      </a:pPr>
+                      <a:r>
+                        <a:rPr lang="ko-KR" altLang="en-US"/>
+                        <a:t>자원 획득 → 업그레이드 UI 구현</a:t>
+                      </a:r>
+                      <a:endParaRPr lang="ko-KR" altLang="en-US"/>
+                    </a:p>
+                  </a:txBody>
+                  <a:tcPr marL="91440" marR="91440"/>
+                </a:tc>
+              </a:tr>
+              <a:tr h="370840">
+                <a:tc>
+                  <a:txBody>
+                    <a:bodyPr vert="horz" wrap="square" lIns="91440" tIns="45720" rIns="91440" bIns="45720" anchor="t" anchorCtr="0">
+                      <a:spAutoFit/>
+                    </a:bodyPr>
+                    <a:p>
+                      <a:pPr>
+                        <a:defRPr/>
+                      </a:pPr>
+                      <a:r>
+                        <a:rPr lang="en-US" altLang="ko-KR"/>
+                        <a:t>6</a:t>
+                      </a:r>
+                      <a:r>
+                        <a:rPr lang="ko-KR" altLang="en-US"/>
+                        <a:t>주차</a:t>
+                      </a:r>
+                      <a:endParaRPr lang="en-US" altLang="ko-KR"/>
+                    </a:p>
+                  </a:txBody>
+                  <a:tcPr marL="91440" marR="91440"/>
+                </a:tc>
+                <a:tc>
+                  <a:txBody>
+                    <a:bodyPr vert="horz" wrap="square" lIns="91440" tIns="45720" rIns="91440" bIns="45720" anchor="t" anchorCtr="0">
+                      <a:spAutoFit/>
+                    </a:bodyPr>
+                    <a:p>
+                      <a:pPr>
+                        <a:defRPr/>
+                      </a:pPr>
+                      <a:r>
+                        <a:rPr lang="ko-KR" altLang="en-US"/>
+                        <a:t>무기 시스템(원거리 공격) 추가</a:t>
+                      </a:r>
+                      <a:endParaRPr lang="ko-KR" altLang="en-US"/>
+                    </a:p>
+                  </a:txBody>
+                  <a:tcPr marL="91440" marR="91440"/>
+                </a:tc>
+              </a:tr>
+              <a:tr h="370840">
+                <a:tc>
+                  <a:txBody>
+                    <a:bodyPr vert="horz" wrap="square" lIns="91440" tIns="45720" rIns="91440" bIns="45720" anchor="t" anchorCtr="0">
+                      <a:spAutoFit/>
+                    </a:bodyPr>
+                    <a:p>
+                      <a:pPr>
+                        <a:defRPr/>
+                      </a:pPr>
+                      <a:r>
+                        <a:rPr lang="en-US" altLang="ko-KR"/>
+                        <a:t>7</a:t>
+                      </a:r>
+                      <a:r>
+                        <a:rPr lang="ko-KR" altLang="en-US"/>
+                        <a:t>주차</a:t>
+                      </a:r>
+                      <a:endParaRPr lang="en-US" altLang="ko-KR"/>
+                    </a:p>
+                  </a:txBody>
+                  <a:tcPr marL="91440" marR="91440"/>
+                </a:tc>
+                <a:tc>
+                  <a:txBody>
+                    <a:bodyPr vert="horz" wrap="square" lIns="91440" tIns="45720" rIns="91440" bIns="45720" anchor="t" anchorCtr="0">
+                      <a:spAutoFit/>
+                    </a:bodyPr>
+                    <a:p>
+                      <a:pPr>
+                        <a:defRPr/>
+                      </a:pPr>
+                      <a:r>
+                        <a:rPr lang="ko-KR" altLang="en-US"/>
+                        <a:t>경험치/레벨업 + 로그라이크 선택 시스템</a:t>
+                      </a:r>
+                      <a:endParaRPr lang="ko-KR" altLang="en-US"/>
+                    </a:p>
+                  </a:txBody>
+                  <a:tcPr marL="91440" marR="91440"/>
+                </a:tc>
+              </a:tr>
+              <a:tr h="370840">
+                <a:tc>
+                  <a:txBody>
+                    <a:bodyPr vert="horz" wrap="square" lIns="91440" tIns="45720" rIns="91440" bIns="45720" anchor="t" anchorCtr="0">
+                      <a:spAutoFit/>
+                    </a:bodyPr>
+                    <a:p>
+                      <a:pPr>
+                        <a:defRPr/>
+                      </a:pPr>
+                      <a:r>
+                        <a:rPr lang="en-US" altLang="ko-KR"/>
+                        <a:t>8</a:t>
+                      </a:r>
+                      <a:r>
+                        <a:rPr lang="ko-KR" altLang="en-US"/>
+                        <a:t>주차</a:t>
+                      </a:r>
+                      <a:endParaRPr lang="en-US" altLang="ko-KR"/>
+                    </a:p>
+                  </a:txBody>
+                  <a:tcPr marL="91440" marR="91440"/>
+                </a:tc>
+                <a:tc>
+                  <a:txBody>
+                    <a:bodyPr vert="horz" wrap="square" lIns="91440" tIns="45720" rIns="91440" bIns="45720" anchor="t" anchorCtr="0">
+                      <a:spAutoFit/>
+                    </a:bodyPr>
+                    <a:p>
+                      <a:pPr>
+                        <a:defRPr/>
+                      </a:pPr>
+                      <a:r>
+                        <a:rPr lang="ko-KR" altLang="en-US"/>
+                        <a:t>사운드/이펙트/스테이지 확장</a:t>
+                      </a:r>
+                      <a:endParaRPr lang="ko-KR" altLang="en-US"/>
+                    </a:p>
+                  </a:txBody>
+                  <a:tcPr marL="91440" marR="91440"/>
+                </a:tc>
+              </a:tr>
+              <a:tr h="370840">
+                <a:tc>
+                  <a:txBody>
+                    <a:bodyPr vert="horz" wrap="square" lIns="91440" tIns="45720" rIns="91440" bIns="45720" anchor="t" anchorCtr="0">
+                      <a:spAutoFit/>
+                    </a:bodyPr>
+                    <a:p>
+                      <a:pPr>
+                        <a:defRPr/>
+                      </a:pPr>
+                      <a:r>
+                        <a:rPr lang="en-US" altLang="ko-KR"/>
+                        <a:t>9</a:t>
+                      </a:r>
+                      <a:r>
+                        <a:rPr lang="ko-KR" altLang="en-US"/>
+                        <a:t>주차</a:t>
+                      </a:r>
+                      <a:endParaRPr lang="en-US" altLang="ko-KR"/>
+                    </a:p>
+                  </a:txBody>
+                  <a:tcPr marL="91440" marR="91440"/>
+                </a:tc>
+                <a:tc>
+                  <a:txBody>
+                    <a:bodyPr vert="horz" wrap="square" lIns="91440" tIns="45720" rIns="91440" bIns="45720" anchor="t" anchorCtr="0">
+                      <a:spAutoFit/>
+                    </a:bodyPr>
+                    <a:p>
+                      <a:pPr>
+                        <a:defRPr/>
+                      </a:pPr>
+                      <a:r>
+                        <a:rPr lang="ko-KR" altLang="en-US"/>
+                        <a:t>밸런싱, 버그 수정, 발표 자료 준비</a:t>
+                      </a:r>
+                      <a:endParaRPr lang="ko-KR" altLang="en-US"/>
+                    </a:p>
+                  </a:txBody>
+                  <a:tcPr marL="91440" marR="91440"/>
+                </a:tc>
+              </a:tr>
+            </a:tbl>
+          </a:graphicData>
+        </a:graphic>
+      </p:graphicFrame>
     </p:spTree>
     <p:extLst>
       <p:ext uri="{BB962C8B-B14F-4D97-AF65-F5344CB8AC3E}">
@@ -3376,7 +4240,1086 @@
   </p:clrMapOvr>
   <mc:AlternateContent xmlns:mc="http://schemas.openxmlformats.org/markup-compatibility/2006">
     <mc:Choice xmlns:p14="http://schemas.microsoft.com/office/powerpoint/2010/main" Requires="p14">
-      <p:transition xmlns:mc="http://schemas.openxmlformats.org/markup-compatibility/2006" xmlns:p14="http://schemas.microsoft.com/office/powerpoint/2010/main" mc:Ignorable="p14" p14:dur="500"/>
+      <p:transition xmlns:mc="http://schemas.openxmlformats.org/markup-compatibility/2006" xmlns:p14="http://schemas.microsoft.com/office/powerpoint/2010/main" advTm="18469" mc:Ignorable="p14" p14:dur="500"/>
+    </mc:Choice>
+    <mc:Fallback>
+      <p:transition/>
+    </mc:Fallback>
+  </mc:AlternateContent>
+  <p:timing>
+    <p:tnLst>
+      <p:par>
+        <p:cTn id="1" dur="indefinite" restart="never" nodeType="tmRoot"/>
+      </p:par>
+    </p:tnLst>
+  </p:timing>
+</p:sld>
+</file>
+
+<file path=ppt/slides/slide3.xml><?xml version="1.0" encoding="utf-8"?>
+<p:sld xmlns:r="http://schemas.openxmlformats.org/officeDocument/2006/relationships" xmlns:c="http://schemas.openxmlformats.org/drawingml/2006/chart" xmlns:a="http://schemas.openxmlformats.org/drawingml/2006/main" xmlns:dgm="http://schemas.openxmlformats.org/drawingml/2006/diagram" xmlns:dsp="http://schemas.microsoft.com/office/drawing/2008/diagram" xmlns:p="http://schemas.openxmlformats.org/presentationml/2006/main">
+  <p:cSld>
+    <p:spTree>
+      <p:nvGrpSpPr>
+        <p:cNvPr id="1" name=""/>
+        <p:cNvGrpSpPr/>
+        <p:nvPr/>
+      </p:nvGrpSpPr>
+      <p:grpSpPr>
+        <a:xfrm>
+          <a:off x="0" y="0"/>
+          <a:ext cx="0" cy="0"/>
+          <a:chOff x="0" y="0"/>
+          <a:chExt cx="0" cy="0"/>
+        </a:xfrm>
+      </p:grpSpPr>
+      <p:cxnSp>
+        <p:nvCxnSpPr>
+          <p:cNvPr id="7" name=""/>
+          <p:cNvCxnSpPr/>
+          <p:nvPr/>
+        </p:nvCxnSpPr>
+        <p:spPr>
+          <a:xfrm>
+            <a:off x="9020968" y="1943616"/>
+            <a:ext cx="500062" cy="0"/>
+          </a:xfrm>
+          <a:prstGeom prst="straightConnector1">
+            <a:avLst/>
+          </a:prstGeom>
+          <a:ln>
+            <a:solidFill>
+              <a:schemeClr val="dk1"/>
+            </a:solidFill>
+            <a:tailEnd type="arrow"/>
+          </a:ln>
+        </p:spPr>
+        <p:style>
+          <a:lnRef idx="1">
+            <a:schemeClr val="accent1"/>
+          </a:lnRef>
+          <a:fillRef idx="0">
+            <a:schemeClr val="accent1"/>
+          </a:fillRef>
+          <a:effectRef idx="0">
+            <a:schemeClr val="accent1"/>
+          </a:effectRef>
+          <a:fontRef idx="minor">
+            <a:schemeClr val="tx1"/>
+          </a:fontRef>
+        </p:style>
+      </p:cxnSp>
+      <p:sp>
+        <p:nvSpPr>
+          <p:cNvPr id="8" name=""/>
+          <p:cNvSpPr txBox="1"/>
+          <p:nvPr/>
+        </p:nvSpPr>
+        <p:spPr>
+          <a:xfrm>
+            <a:off x="9521030" y="1761807"/>
+            <a:ext cx="827483" cy="366832"/>
+          </a:xfrm>
+          <a:prstGeom prst="rect">
+            <a:avLst/>
+          </a:prstGeom>
+        </p:spPr>
+        <p:txBody>
+          <a:bodyPr wrap="square">
+            <a:spAutoFit/>
+          </a:bodyPr>
+          <a:p>
+            <a:pPr>
+              <a:defRPr/>
+            </a:pPr>
+            <a:r>
+              <a:rPr lang="en-US" altLang="ko-KR"/>
+              <a:t>100%</a:t>
+            </a:r>
+            <a:endParaRPr lang="en-US" altLang="ko-KR"/>
+          </a:p>
+        </p:txBody>
+      </p:sp>
+      <p:cxnSp>
+        <p:nvCxnSpPr>
+          <p:cNvPr id="9" name=""/>
+          <p:cNvCxnSpPr/>
+          <p:nvPr/>
+        </p:nvCxnSpPr>
+        <p:spPr>
+          <a:xfrm>
+            <a:off x="9020970" y="2310448"/>
+            <a:ext cx="500062" cy="0"/>
+          </a:xfrm>
+          <a:prstGeom prst="straightConnector1">
+            <a:avLst/>
+          </a:prstGeom>
+          <a:noFill/>
+          <a:ln w="12700" cap="flat" cmpd="sng" algn="ctr">
+            <a:solidFill>
+              <a:srgbClr val="000000">
+                <a:alpha val="100000"/>
+              </a:srgbClr>
+            </a:solidFill>
+            <a:prstDash val="solid"/>
+            <a:tailEnd type="arrow"/>
+          </a:ln>
+        </p:spPr>
+      </p:cxnSp>
+      <p:sp>
+        <p:nvSpPr>
+          <p:cNvPr id="10" name=""/>
+          <p:cNvSpPr txBox="1"/>
+          <p:nvPr/>
+        </p:nvSpPr>
+        <p:spPr>
+          <a:xfrm>
+            <a:off x="9521032" y="2128639"/>
+            <a:ext cx="827483" cy="366832"/>
+          </a:xfrm>
+          <a:prstGeom prst="rect">
+            <a:avLst/>
+          </a:prstGeom>
+        </p:spPr>
+        <p:txBody>
+          <a:bodyPr wrap="square">
+            <a:spAutoFit/>
+          </a:bodyPr>
+          <a:p>
+            <a:pPr marL="0" indent="0" algn="l" defTabSz="914400" rtl="0" eaLnBrk="1" latinLnBrk="1" hangingPunct="1">
+              <a:lnSpc>
+                <a:spcPct val="100000"/>
+              </a:lnSpc>
+              <a:spcBef>
+                <a:spcPct val="0"/>
+              </a:spcBef>
+              <a:spcAft>
+                <a:spcPts val="0"/>
+              </a:spcAft>
+              <a:buNone/>
+              <a:defRPr/>
+            </a:pPr>
+            <a:r>
+              <a:rPr xmlns:mc="http://schemas.openxmlformats.org/markup-compatibility/2006" xmlns:hp="http://schemas.haansoft.com/office/presentation/8.0" kumimoji="0" lang="en-US" altLang="ko-KR" sz="1800" b="0" i="0" u="none" strike="noStrike" kern="1200" cap="none" spc="0" normalizeH="0" baseline="0" mc:Ignorable="hp" hp:hslEmbossed="0">
+                <a:solidFill>
+                  <a:srgbClr val="000000"/>
+                </a:solidFill>
+                <a:latin typeface="Calibri"/>
+                <a:ea typeface="맑은 고딕"/>
+                <a:cs typeface="Calibri"/>
+              </a:rPr>
+              <a:t>100%</a:t>
+            </a:r>
+            <a:endParaRPr xmlns:mc="http://schemas.openxmlformats.org/markup-compatibility/2006" xmlns:hp="http://schemas.haansoft.com/office/presentation/8.0" kumimoji="0" lang="en-US" altLang="ko-KR" sz="1800" b="0" i="0" u="none" strike="noStrike" kern="1200" cap="none" spc="0" normalizeH="0" baseline="0" mc:Ignorable="hp" hp:hslEmbossed="0">
+              <a:solidFill>
+                <a:srgbClr val="000000"/>
+              </a:solidFill>
+              <a:latin typeface="Calibri"/>
+              <a:ea typeface="맑은 고딕"/>
+              <a:cs typeface="Calibri"/>
+            </a:endParaRPr>
+          </a:p>
+        </p:txBody>
+      </p:sp>
+      <p:cxnSp>
+        <p:nvCxnSpPr>
+          <p:cNvPr id="11" name=""/>
+          <p:cNvCxnSpPr/>
+          <p:nvPr/>
+        </p:nvCxnSpPr>
+        <p:spPr>
+          <a:xfrm>
+            <a:off x="9020970" y="2677280"/>
+            <a:ext cx="500062" cy="0"/>
+          </a:xfrm>
+          <a:prstGeom prst="straightConnector1">
+            <a:avLst/>
+          </a:prstGeom>
+          <a:noFill/>
+          <a:ln w="12700" cap="flat" cmpd="sng" algn="ctr">
+            <a:solidFill>
+              <a:srgbClr val="000000">
+                <a:alpha val="100000"/>
+              </a:srgbClr>
+            </a:solidFill>
+            <a:prstDash val="solid"/>
+            <a:tailEnd type="arrow"/>
+          </a:ln>
+        </p:spPr>
+      </p:cxnSp>
+      <p:sp>
+        <p:nvSpPr>
+          <p:cNvPr id="12" name=""/>
+          <p:cNvSpPr txBox="1"/>
+          <p:nvPr/>
+        </p:nvSpPr>
+        <p:spPr>
+          <a:xfrm>
+            <a:off x="9521032" y="2495471"/>
+            <a:ext cx="827483" cy="366832"/>
+          </a:xfrm>
+          <a:prstGeom prst="rect">
+            <a:avLst/>
+          </a:prstGeom>
+        </p:spPr>
+        <p:txBody>
+          <a:bodyPr wrap="square">
+            <a:spAutoFit/>
+          </a:bodyPr>
+          <a:p>
+            <a:pPr marL="0" indent="0" algn="l" defTabSz="914400" rtl="0" eaLnBrk="1" latinLnBrk="1" hangingPunct="1">
+              <a:lnSpc>
+                <a:spcPct val="100000"/>
+              </a:lnSpc>
+              <a:spcBef>
+                <a:spcPct val="0"/>
+              </a:spcBef>
+              <a:spcAft>
+                <a:spcPts val="0"/>
+              </a:spcAft>
+              <a:buNone/>
+              <a:defRPr/>
+            </a:pPr>
+            <a:r>
+              <a:rPr xmlns:mc="http://schemas.openxmlformats.org/markup-compatibility/2006" xmlns:hp="http://schemas.haansoft.com/office/presentation/8.0" kumimoji="0" lang="en-US" altLang="ko-KR" sz="1800" b="0" i="0" u="none" strike="noStrike" kern="1200" cap="none" spc="0" normalizeH="0" baseline="0" mc:Ignorable="hp" hp:hslEmbossed="0">
+                <a:solidFill>
+                  <a:srgbClr val="000000"/>
+                </a:solidFill>
+                <a:latin typeface="Calibri"/>
+                <a:ea typeface="맑은 고딕"/>
+                <a:cs typeface="Calibri"/>
+              </a:rPr>
+              <a:t>100%</a:t>
+            </a:r>
+            <a:endParaRPr xmlns:mc="http://schemas.openxmlformats.org/markup-compatibility/2006" xmlns:hp="http://schemas.haansoft.com/office/presentation/8.0" kumimoji="0" lang="en-US" altLang="ko-KR" sz="1800" b="0" i="0" u="none" strike="noStrike" kern="1200" cap="none" spc="0" normalizeH="0" baseline="0" mc:Ignorable="hp" hp:hslEmbossed="0">
+              <a:solidFill>
+                <a:srgbClr val="000000"/>
+              </a:solidFill>
+              <a:latin typeface="Calibri"/>
+              <a:ea typeface="맑은 고딕"/>
+              <a:cs typeface="Calibri"/>
+            </a:endParaRPr>
+          </a:p>
+        </p:txBody>
+      </p:sp>
+      <p:cxnSp>
+        <p:nvCxnSpPr>
+          <p:cNvPr id="13" name=""/>
+          <p:cNvCxnSpPr/>
+          <p:nvPr/>
+        </p:nvCxnSpPr>
+        <p:spPr>
+          <a:xfrm>
+            <a:off x="9020970" y="3098046"/>
+            <a:ext cx="500062" cy="0"/>
+          </a:xfrm>
+          <a:prstGeom prst="straightConnector1">
+            <a:avLst/>
+          </a:prstGeom>
+          <a:noFill/>
+          <a:ln w="12700" cap="flat" cmpd="sng" algn="ctr">
+            <a:solidFill>
+              <a:srgbClr val="000000">
+                <a:alpha val="100000"/>
+              </a:srgbClr>
+            </a:solidFill>
+            <a:prstDash val="solid"/>
+            <a:tailEnd type="arrow"/>
+          </a:ln>
+        </p:spPr>
+      </p:cxnSp>
+      <p:sp>
+        <p:nvSpPr>
+          <p:cNvPr id="14" name=""/>
+          <p:cNvSpPr txBox="1"/>
+          <p:nvPr/>
+        </p:nvSpPr>
+        <p:spPr>
+          <a:xfrm>
+            <a:off x="9521032" y="2916237"/>
+            <a:ext cx="827483" cy="366832"/>
+          </a:xfrm>
+          <a:prstGeom prst="rect">
+            <a:avLst/>
+          </a:prstGeom>
+        </p:spPr>
+        <p:txBody>
+          <a:bodyPr wrap="square">
+            <a:spAutoFit/>
+          </a:bodyPr>
+          <a:p>
+            <a:pPr marL="0" indent="0" algn="l" defTabSz="914400" rtl="0" eaLnBrk="1" latinLnBrk="1" hangingPunct="1">
+              <a:lnSpc>
+                <a:spcPct val="100000"/>
+              </a:lnSpc>
+              <a:spcBef>
+                <a:spcPct val="0"/>
+              </a:spcBef>
+              <a:spcAft>
+                <a:spcPts val="0"/>
+              </a:spcAft>
+              <a:buNone/>
+              <a:defRPr/>
+            </a:pPr>
+            <a:r>
+              <a:rPr xmlns:mc="http://schemas.openxmlformats.org/markup-compatibility/2006" xmlns:hp="http://schemas.haansoft.com/office/presentation/8.0" kumimoji="0" lang="en-US" altLang="ko-KR" sz="1800" b="0" i="0" u="none" strike="noStrike" kern="1200" cap="none" spc="0" normalizeH="0" baseline="0" mc:Ignorable="hp" hp:hslEmbossed="0">
+                <a:solidFill>
+                  <a:srgbClr val="000000"/>
+                </a:solidFill>
+                <a:latin typeface="Calibri"/>
+                <a:ea typeface="맑은 고딕"/>
+                <a:cs typeface="Calibri"/>
+              </a:rPr>
+              <a:t>100%</a:t>
+            </a:r>
+            <a:endParaRPr xmlns:mc="http://schemas.openxmlformats.org/markup-compatibility/2006" xmlns:hp="http://schemas.haansoft.com/office/presentation/8.0" kumimoji="0" lang="en-US" altLang="ko-KR" sz="1800" b="0" i="0" u="none" strike="noStrike" kern="1200" cap="none" spc="0" normalizeH="0" baseline="0" mc:Ignorable="hp" hp:hslEmbossed="0">
+              <a:solidFill>
+                <a:srgbClr val="000000"/>
+              </a:solidFill>
+              <a:latin typeface="Calibri"/>
+              <a:ea typeface="맑은 고딕"/>
+              <a:cs typeface="Calibri"/>
+            </a:endParaRPr>
+          </a:p>
+        </p:txBody>
+      </p:sp>
+      <p:graphicFrame>
+        <p:nvGraphicFramePr>
+          <p:cNvPr id="15" name=""/>
+          <p:cNvGraphicFramePr>
+            <a:graphicFrameLocks noGrp="1"/>
+          </p:cNvGraphicFramePr>
+          <p:nvPr/>
+        </p:nvGraphicFramePr>
+        <p:xfrm>
+          <a:off x="892969" y="1761807"/>
+          <a:ext cx="8128000" cy="3334385"/>
+        </p:xfrm>
+        <a:graphic>
+          <a:graphicData uri="http://schemas.openxmlformats.org/drawingml/2006/table">
+            <a:tbl>
+              <a:tblPr firstRow="1" bandRow="1">
+                <a:tableStyle styleId="{1F423C0B-24CF-4C3C-8A59-7768EA0501B5}" styleName="Normal Style 1 - Accent 3">
+                  <a:wholeTbl>
+                    <a:tcTxStyle>
+                      <a:fontRef idx="minor">
+                        <a:prstClr val="black"/>
+                      </a:fontRef>
+                      <a:schemeClr val="dk1"/>
+                    </a:tcTxStyle>
+                    <a:tcStyle>
+                      <a:tcBdr>
+                        <a:left>
+                          <a:ln w="12700" cmpd="sng">
+                            <a:solidFill>
+                              <a:schemeClr val="lt1"/>
+                            </a:solidFill>
+                          </a:ln>
+                        </a:left>
+                        <a:right>
+                          <a:ln w="12700" cmpd="sng">
+                            <a:solidFill>
+                              <a:schemeClr val="lt1"/>
+                            </a:solidFill>
+                          </a:ln>
+                        </a:right>
+                        <a:top>
+                          <a:ln w="12700" cmpd="sng">
+                            <a:solidFill>
+                              <a:schemeClr val="lt1"/>
+                            </a:solidFill>
+                          </a:ln>
+                        </a:top>
+                        <a:bottom>
+                          <a:ln w="12700" cmpd="sng">
+                            <a:solidFill>
+                              <a:schemeClr val="lt1"/>
+                            </a:solidFill>
+                          </a:ln>
+                        </a:bottom>
+                        <a:insideH>
+                          <a:ln w="12700" cmpd="sng">
+                            <a:solidFill>
+                              <a:schemeClr val="lt1"/>
+                            </a:solidFill>
+                          </a:ln>
+                        </a:insideH>
+                        <a:insideV>
+                          <a:ln w="12700" cmpd="sng">
+                            <a:solidFill>
+                              <a:schemeClr val="lt1"/>
+                            </a:solidFill>
+                          </a:ln>
+                        </a:insideV>
+                      </a:tcBdr>
+                      <a:fill>
+                        <a:solidFill>
+                          <a:schemeClr val="accent3">
+                            <a:lum val="90000"/>
+                          </a:schemeClr>
+                        </a:solidFill>
+                      </a:fill>
+                    </a:tcStyle>
+                  </a:wholeTbl>
+                  <a:band1H>
+                    <a:tcTxStyle/>
+                    <a:tcStyle>
+                      <a:tcBdr/>
+                      <a:fill>
+                        <a:solidFill>
+                          <a:schemeClr val="accent3">
+                            <a:lum val="80000"/>
+                          </a:schemeClr>
+                        </a:solidFill>
+                      </a:fill>
+                    </a:tcStyle>
+                  </a:band1H>
+                  <a:band2H>
+                    <a:tcTxStyle/>
+                    <a:tcStyle>
+                      <a:tcBdr/>
+                    </a:tcStyle>
+                  </a:band2H>
+                  <a:band1V>
+                    <a:tcTxStyle/>
+                    <a:tcStyle>
+                      <a:tcBdr/>
+                      <a:fill>
+                        <a:solidFill>
+                          <a:schemeClr val="accent3">
+                            <a:lum val="80000"/>
+                          </a:schemeClr>
+                        </a:solidFill>
+                      </a:fill>
+                    </a:tcStyle>
+                  </a:band1V>
+                  <a:band2V>
+                    <a:tcTxStyle/>
+                    <a:tcStyle>
+                      <a:tcBdr/>
+                    </a:tcStyle>
+                  </a:band2V>
+                  <a:lastCol>
+                    <a:tcTxStyle b="on">
+                      <a:fontRef idx="minor">
+                        <a:prstClr val="black"/>
+                      </a:fontRef>
+                      <a:schemeClr val="lt1"/>
+                    </a:tcTxStyle>
+                    <a:tcStyle>
+                      <a:tcBdr/>
+                      <a:fill>
+                        <a:solidFill>
+                          <a:schemeClr val="accent3"/>
+                        </a:solidFill>
+                      </a:fill>
+                    </a:tcStyle>
+                  </a:lastCol>
+                  <a:firstCol>
+                    <a:tcTxStyle b="on">
+                      <a:fontRef idx="minor">
+                        <a:prstClr val="black"/>
+                      </a:fontRef>
+                      <a:schemeClr val="lt1"/>
+                    </a:tcTxStyle>
+                    <a:tcStyle>
+                      <a:tcBdr/>
+                      <a:fill>
+                        <a:solidFill>
+                          <a:schemeClr val="accent3"/>
+                        </a:solidFill>
+                      </a:fill>
+                    </a:tcStyle>
+                  </a:firstCol>
+                  <a:lastRow>
+                    <a:tcTxStyle b="on">
+                      <a:fontRef idx="minor">
+                        <a:prstClr val="black"/>
+                      </a:fontRef>
+                      <a:schemeClr val="lt1"/>
+                    </a:tcTxStyle>
+                    <a:tcStyle>
+                      <a:tcBdr>
+                        <a:top>
+                          <a:ln w="38100" cmpd="sng">
+                            <a:solidFill>
+                              <a:schemeClr val="lt1"/>
+                            </a:solidFill>
+                          </a:ln>
+                        </a:top>
+                      </a:tcBdr>
+                      <a:fill>
+                        <a:solidFill>
+                          <a:schemeClr val="accent3"/>
+                        </a:solidFill>
+                      </a:fill>
+                    </a:tcStyle>
+                  </a:lastRow>
+                  <a:firstRow>
+                    <a:tcTxStyle b="on">
+                      <a:fontRef idx="minor">
+                        <a:prstClr val="black"/>
+                      </a:fontRef>
+                      <a:schemeClr val="lt1"/>
+                    </a:tcTxStyle>
+                    <a:tcStyle>
+                      <a:tcBdr>
+                        <a:bottom>
+                          <a:ln w="38100" cmpd="sng">
+                            <a:solidFill>
+                              <a:schemeClr val="lt1"/>
+                            </a:solidFill>
+                          </a:ln>
+                        </a:bottom>
+                      </a:tcBdr>
+                      <a:fill>
+                        <a:solidFill>
+                          <a:schemeClr val="accent3"/>
+                        </a:solidFill>
+                      </a:fill>
+                    </a:tcStyle>
+                  </a:firstRow>
+                </a:tableStyle>
+              </a:tblPr>
+              <a:tblGrid>
+                <a:gridCol w="980281"/>
+                <a:gridCol w="7147718"/>
+              </a:tblGrid>
+              <a:tr h="116840">
+                <a:tc>
+                  <a:txBody>
+                    <a:bodyPr vert="horz" wrap="square" lIns="91440" tIns="45720" rIns="91440" bIns="45720" anchor="t" anchorCtr="0">
+                      <a:spAutoFit/>
+                    </a:bodyPr>
+                    <a:p>
+                      <a:pPr>
+                        <a:defRPr/>
+                      </a:pPr>
+                      <a:r>
+                        <a:rPr lang="ko-KR" altLang="en-US" b="0">
+                          <a:solidFill>
+                            <a:schemeClr val="tx1"/>
+                          </a:solidFill>
+                        </a:rPr>
+                        <a:t>1주차</a:t>
+                      </a:r>
+                      <a:endParaRPr lang="ko-KR" altLang="en-US" b="0">
+                        <a:solidFill>
+                          <a:schemeClr val="tx1"/>
+                        </a:solidFill>
+                      </a:endParaRPr>
+                    </a:p>
+                  </a:txBody>
+                  <a:tcPr marL="91440" marR="91440"/>
+                </a:tc>
+                <a:tc>
+                  <a:txBody>
+                    <a:bodyPr vert="horz" wrap="square" lIns="91440" tIns="45720" rIns="91440" bIns="45720" anchor="t" anchorCtr="0">
+                      <a:spAutoFit/>
+                    </a:bodyPr>
+                    <a:p>
+                      <a:pPr>
+                        <a:defRPr/>
+                      </a:pPr>
+                      <a:r>
+                        <a:rPr lang="ko-KR" altLang="en-US" b="0" strike="sngStrike">
+                          <a:solidFill>
+                            <a:srgbClr val="ff0000"/>
+                          </a:solidFill>
+                        </a:rPr>
+                        <a:t>환경 세팅</a:t>
+                      </a:r>
+                      <a:r>
+                        <a:rPr lang="en-US" altLang="ko-KR" b="0" strike="sngStrike">
+                          <a:solidFill>
+                            <a:srgbClr val="ff0000"/>
+                          </a:solidFill>
+                        </a:rPr>
+                        <a:t>,</a:t>
+                      </a:r>
+                      <a:r>
+                        <a:rPr lang="ko-KR" altLang="en-US" b="0">
+                          <a:solidFill>
+                            <a:schemeClr val="tx1"/>
+                          </a:solidFill>
+                        </a:rPr>
+                        <a:t> 기본 캐릭터/행성 리소스 불러오기</a:t>
+                      </a:r>
+                      <a:endParaRPr lang="ko-KR" altLang="en-US" b="0">
+                        <a:solidFill>
+                          <a:schemeClr val="tx1"/>
+                        </a:solidFill>
+                      </a:endParaRPr>
+                    </a:p>
+                  </a:txBody>
+                  <a:tcPr marL="91440" marR="91440"/>
+                </a:tc>
+              </a:tr>
+              <a:tr h="370840">
+                <a:tc>
+                  <a:txBody>
+                    <a:bodyPr vert="horz" wrap="square" lIns="91440" tIns="45720" rIns="91440" bIns="45720" anchor="t" anchorCtr="0">
+                      <a:spAutoFit/>
+                    </a:bodyPr>
+                    <a:p>
+                      <a:pPr>
+                        <a:defRPr/>
+                      </a:pPr>
+                      <a:r>
+                        <a:rPr lang="en-US" altLang="ko-KR"/>
+                        <a:t>2</a:t>
+                      </a:r>
+                      <a:r>
+                        <a:rPr lang="ko-KR" altLang="en-US"/>
+                        <a:t>주차</a:t>
+                      </a:r>
+                      <a:endParaRPr lang="ko-KR" altLang="en-US"/>
+                    </a:p>
+                  </a:txBody>
+                  <a:tcPr marL="91440" marR="91440"/>
+                </a:tc>
+                <a:tc>
+                  <a:txBody>
+                    <a:bodyPr vert="horz" wrap="square" lIns="91440" tIns="45720" rIns="91440" bIns="45720" anchor="t" anchorCtr="0">
+                      <a:spAutoFit/>
+                    </a:bodyPr>
+                    <a:p>
+                      <a:pPr>
+                        <a:defRPr/>
+                      </a:pPr>
+                      <a:r>
+                        <a:rPr lang="ko-KR" altLang="en-US">
+                          <a:solidFill>
+                            <a:srgbClr val="ff0000"/>
+                          </a:solidFill>
+                        </a:rPr>
+                        <a:t>게임 모드 구조 전체 분리</a:t>
+                      </a:r>
+                      <a:endParaRPr lang="ko-KR" altLang="en-US">
+                        <a:solidFill>
+                          <a:srgbClr val="ff0000"/>
+                        </a:solidFill>
+                      </a:endParaRPr>
+                    </a:p>
+                  </a:txBody>
+                  <a:tcPr marL="91440" marR="91440"/>
+                </a:tc>
+              </a:tr>
+              <a:tr h="370840">
+                <a:tc>
+                  <a:txBody>
+                    <a:bodyPr vert="horz" wrap="square" lIns="91440" tIns="45720" rIns="91440" bIns="45720" anchor="t" anchorCtr="0">
+                      <a:spAutoFit/>
+                    </a:bodyPr>
+                    <a:p>
+                      <a:pPr>
+                        <a:defRPr/>
+                      </a:pPr>
+                      <a:r>
+                        <a:rPr lang="en-US" altLang="ko-KR"/>
+                        <a:t>3</a:t>
+                      </a:r>
+                      <a:r>
+                        <a:rPr lang="ko-KR" altLang="en-US"/>
+                        <a:t>주차</a:t>
+                      </a:r>
+                      <a:endParaRPr lang="ko-KR" altLang="en-US"/>
+                    </a:p>
+                  </a:txBody>
+                  <a:tcPr marL="91440" marR="91440"/>
+                </a:tc>
+                <a:tc>
+                  <a:txBody>
+                    <a:bodyPr vert="horz" wrap="square" lIns="91440" tIns="45720" rIns="91440" bIns="45720" anchor="t" anchorCtr="0">
+                      <a:spAutoFit/>
+                    </a:bodyPr>
+                    <a:p>
+                      <a:pPr>
+                        <a:defRPr/>
+                      </a:pPr>
+                      <a:r>
+                        <a:rPr lang="ko-KR" altLang="en-US">
+                          <a:solidFill>
+                            <a:srgbClr val="ff0000"/>
+                          </a:solidFill>
+                        </a:rPr>
+                        <a:t>케릭터 이동 및 드릴 회전 구현 </a:t>
+                      </a:r>
+                      <a:r>
+                        <a:rPr lang="ko-KR" altLang="en-US"/>
+                        <a:t>+ 충돌 판정</a:t>
+                      </a:r>
+                      <a:endParaRPr lang="ko-KR" altLang="en-US"/>
+                    </a:p>
+                  </a:txBody>
+                  <a:tcPr marL="91440" marR="91440"/>
+                </a:tc>
+              </a:tr>
+              <a:tr h="370840">
+                <a:tc>
+                  <a:txBody>
+                    <a:bodyPr vert="horz" wrap="square" lIns="91440" tIns="45720" rIns="91440" bIns="45720" anchor="t" anchorCtr="0">
+                      <a:spAutoFit/>
+                    </a:bodyPr>
+                    <a:p>
+                      <a:pPr>
+                        <a:defRPr/>
+                      </a:pPr>
+                      <a:r>
+                        <a:rPr lang="en-US" altLang="ko-KR"/>
+                        <a:t>4</a:t>
+                      </a:r>
+                      <a:r>
+                        <a:rPr lang="ko-KR" altLang="en-US"/>
+                        <a:t>주차</a:t>
+                      </a:r>
+                      <a:endParaRPr lang="en-US" altLang="ko-KR"/>
+                    </a:p>
+                  </a:txBody>
+                  <a:tcPr marL="91440" marR="91440"/>
+                </a:tc>
+                <a:tc>
+                  <a:txBody>
+                    <a:bodyPr vert="horz" wrap="square" lIns="91440" tIns="45720" rIns="91440" bIns="45720" anchor="t" anchorCtr="0">
+                      <a:spAutoFit/>
+                    </a:bodyPr>
+                    <a:p>
+                      <a:pPr>
+                        <a:defRPr/>
+                      </a:pPr>
+                      <a:r>
+                        <a:rPr lang="ko-KR" altLang="en-US">
+                          <a:solidFill>
+                            <a:srgbClr val="ff0000"/>
+                          </a:solidFill>
+                        </a:rPr>
+                        <a:t>각 모드별 세부 디테일 보완 및 </a:t>
+                      </a:r>
+                      <a:r>
+                        <a:rPr lang="en-US" altLang="ko-KR">
+                          <a:solidFill>
+                            <a:srgbClr val="ff0000"/>
+                          </a:solidFill>
+                        </a:rPr>
+                        <a:t>UI</a:t>
+                      </a:r>
+                      <a:r>
+                        <a:rPr lang="ko-KR" altLang="en-US">
+                          <a:solidFill>
+                            <a:srgbClr val="ff0000"/>
+                          </a:solidFill>
+                        </a:rPr>
+                        <a:t> 추가</a:t>
+                      </a:r>
+                      <a:endParaRPr lang="ko-KR" altLang="en-US">
+                        <a:solidFill>
+                          <a:srgbClr val="ff0000"/>
+                        </a:solidFill>
+                      </a:endParaRPr>
+                    </a:p>
+                  </a:txBody>
+                  <a:tcPr marL="91440" marR="91440"/>
+                </a:tc>
+              </a:tr>
+              <a:tr h="370840">
+                <a:tc>
+                  <a:txBody>
+                    <a:bodyPr vert="horz" wrap="square" lIns="91440" tIns="45720" rIns="91440" bIns="45720" anchor="t" anchorCtr="0">
+                      <a:spAutoFit/>
+                    </a:bodyPr>
+                    <a:p>
+                      <a:pPr>
+                        <a:defRPr/>
+                      </a:pPr>
+                      <a:r>
+                        <a:rPr lang="en-US" altLang="ko-KR"/>
+                        <a:t>5</a:t>
+                      </a:r>
+                      <a:r>
+                        <a:rPr lang="ko-KR" altLang="en-US"/>
+                        <a:t>주차</a:t>
+                      </a:r>
+                      <a:endParaRPr lang="en-US" altLang="ko-KR"/>
+                    </a:p>
+                  </a:txBody>
+                  <a:tcPr marL="91440" marR="91440"/>
+                </a:tc>
+                <a:tc>
+                  <a:txBody>
+                    <a:bodyPr vert="horz" wrap="square" lIns="91440" tIns="45720" rIns="91440" bIns="45720" anchor="t" anchorCtr="0">
+                      <a:spAutoFit/>
+                    </a:bodyPr>
+                    <a:p>
+                      <a:pPr>
+                        <a:defRPr/>
+                      </a:pPr>
+                      <a:r>
+                        <a:rPr lang="ko-KR" altLang="en-US">
+                          <a:solidFill>
+                            <a:srgbClr val="ff0000"/>
+                          </a:solidFill>
+                        </a:rPr>
+                        <a:t>행성 구조(지각-맨틀-외핵-내핵)</a:t>
+                      </a:r>
+                      <a:endParaRPr lang="ko-KR" altLang="en-US">
+                        <a:solidFill>
+                          <a:srgbClr val="ff0000"/>
+                        </a:solidFill>
+                      </a:endParaRPr>
+                    </a:p>
+                  </a:txBody>
+                  <a:tcPr marL="91440" marR="91440"/>
+                </a:tc>
+              </a:tr>
+              <a:tr h="370840">
+                <a:tc>
+                  <a:txBody>
+                    <a:bodyPr vert="horz" wrap="square" lIns="91440" tIns="45720" rIns="91440" bIns="45720" anchor="t" anchorCtr="0">
+                      <a:spAutoFit/>
+                    </a:bodyPr>
+                    <a:p>
+                      <a:pPr>
+                        <a:defRPr/>
+                      </a:pPr>
+                      <a:r>
+                        <a:rPr lang="en-US" altLang="ko-KR"/>
+                        <a:t>6</a:t>
+                      </a:r>
+                      <a:r>
+                        <a:rPr lang="ko-KR" altLang="en-US"/>
+                        <a:t>주차</a:t>
+                      </a:r>
+                      <a:endParaRPr lang="en-US" altLang="ko-KR"/>
+                    </a:p>
+                  </a:txBody>
+                  <a:tcPr marL="91440" marR="91440"/>
+                </a:tc>
+                <a:tc>
+                  <a:txBody>
+                    <a:bodyPr vert="horz" wrap="square" lIns="91440" tIns="45720" rIns="91440" bIns="45720" anchor="t" anchorCtr="0">
+                      <a:spAutoFit/>
+                    </a:bodyPr>
+                    <a:p>
+                      <a:pPr>
+                        <a:defRPr/>
+                      </a:pPr>
+                      <a:r>
+                        <a:rPr lang="ko-KR" altLang="en-US">
+                          <a:solidFill>
+                            <a:srgbClr val="ff0000"/>
+                          </a:solidFill>
+                        </a:rPr>
+                        <a:t>광물 채력/가시 데미지 시스템 + 우주선 체력/방어력</a:t>
+                      </a:r>
+                      <a:endParaRPr lang="ko-KR" altLang="en-US">
+                        <a:solidFill>
+                          <a:srgbClr val="ff0000"/>
+                        </a:solidFill>
+                      </a:endParaRPr>
+                    </a:p>
+                  </a:txBody>
+                  <a:tcPr marL="91440" marR="91440"/>
+                </a:tc>
+              </a:tr>
+              <a:tr h="370840">
+                <a:tc>
+                  <a:txBody>
+                    <a:bodyPr vert="horz" wrap="square" lIns="91440" tIns="45720" rIns="91440" bIns="45720" anchor="t" anchorCtr="0">
+                      <a:spAutoFit/>
+                    </a:bodyPr>
+                    <a:p>
+                      <a:pPr>
+                        <a:defRPr/>
+                      </a:pPr>
+                      <a:r>
+                        <a:rPr lang="en-US" altLang="ko-KR"/>
+                        <a:t>7</a:t>
+                      </a:r>
+                      <a:r>
+                        <a:rPr lang="ko-KR" altLang="en-US"/>
+                        <a:t>주차</a:t>
+                      </a:r>
+                      <a:endParaRPr lang="en-US" altLang="ko-KR"/>
+                    </a:p>
+                  </a:txBody>
+                  <a:tcPr marL="91440" marR="91440"/>
+                </a:tc>
+                <a:tc>
+                  <a:txBody>
+                    <a:bodyPr vert="horz" wrap="square" lIns="91440" tIns="45720" rIns="91440" bIns="45720" anchor="t" anchorCtr="0">
+                      <a:spAutoFit/>
+                    </a:bodyPr>
+                    <a:p>
+                      <a:pPr>
+                        <a:defRPr/>
+                      </a:pPr>
+                      <a:r>
+                        <a:rPr lang="ko-KR" altLang="en-US">
+                          <a:solidFill>
+                            <a:srgbClr val="ff0000"/>
+                          </a:solidFill>
+                        </a:rPr>
+                        <a:t>자원 구현</a:t>
+                      </a:r>
+                      <a:r>
+                        <a:rPr lang="en-US" altLang="ko-KR">
+                          <a:solidFill>
+                            <a:srgbClr val="ff0000"/>
+                          </a:solidFill>
+                        </a:rPr>
+                        <a:t>,</a:t>
+                      </a:r>
+                      <a:r>
+                        <a:rPr lang="ko-KR" altLang="en-US">
+                          <a:solidFill>
+                            <a:srgbClr val="ff0000"/>
+                          </a:solidFill>
+                        </a:rPr>
+                        <a:t> 경험치/레벨업 + 로그라이크 선택 시스템</a:t>
+                      </a:r>
+                      <a:endParaRPr lang="ko-KR" altLang="en-US">
+                        <a:solidFill>
+                          <a:srgbClr val="ff0000"/>
+                        </a:solidFill>
+                      </a:endParaRPr>
+                    </a:p>
+                  </a:txBody>
+                  <a:tcPr marL="91440" marR="91440"/>
+                </a:tc>
+              </a:tr>
+              <a:tr h="370840">
+                <a:tc>
+                  <a:txBody>
+                    <a:bodyPr vert="horz" wrap="square" lIns="91440" tIns="45720" rIns="91440" bIns="45720" anchor="t" anchorCtr="0">
+                      <a:spAutoFit/>
+                    </a:bodyPr>
+                    <a:p>
+                      <a:pPr>
+                        <a:defRPr/>
+                      </a:pPr>
+                      <a:r>
+                        <a:rPr lang="en-US" altLang="ko-KR"/>
+                        <a:t>8</a:t>
+                      </a:r>
+                      <a:r>
+                        <a:rPr lang="ko-KR" altLang="en-US"/>
+                        <a:t>주차</a:t>
+                      </a:r>
+                      <a:endParaRPr lang="en-US" altLang="ko-KR"/>
+                    </a:p>
+                  </a:txBody>
+                  <a:tcPr marL="91440" marR="91440"/>
+                </a:tc>
+                <a:tc>
+                  <a:txBody>
+                    <a:bodyPr vert="horz" wrap="square" lIns="91440" tIns="45720" rIns="91440" bIns="45720" anchor="t" anchorCtr="0">
+                      <a:spAutoFit/>
+                    </a:bodyPr>
+                    <a:p>
+                      <a:pPr>
+                        <a:defRPr/>
+                      </a:pPr>
+                      <a:r>
+                        <a:rPr lang="ko-KR" altLang="en-US">
+                          <a:solidFill>
+                            <a:srgbClr val="ff0000"/>
+                          </a:solidFill>
+                        </a:rPr>
+                        <a:t>무기 시스템(원거리 공격) 추가</a:t>
+                      </a:r>
+                      <a:endParaRPr lang="ko-KR" altLang="en-US">
+                        <a:solidFill>
+                          <a:srgbClr val="ff0000"/>
+                        </a:solidFill>
+                      </a:endParaRPr>
+                    </a:p>
+                  </a:txBody>
+                  <a:tcPr marL="91440" marR="91440"/>
+                </a:tc>
+              </a:tr>
+              <a:tr h="370840">
+                <a:tc>
+                  <a:txBody>
+                    <a:bodyPr vert="horz" wrap="square" lIns="91440" tIns="45720" rIns="91440" bIns="45720" anchor="t" anchorCtr="0">
+                      <a:spAutoFit/>
+                    </a:bodyPr>
+                    <a:p>
+                      <a:pPr>
+                        <a:defRPr/>
+                      </a:pPr>
+                      <a:r>
+                        <a:rPr lang="en-US" altLang="ko-KR"/>
+                        <a:t>9</a:t>
+                      </a:r>
+                      <a:r>
+                        <a:rPr lang="ko-KR" altLang="en-US"/>
+                        <a:t>주차</a:t>
+                      </a:r>
+                      <a:endParaRPr lang="en-US" altLang="ko-KR"/>
+                    </a:p>
+                  </a:txBody>
+                  <a:tcPr marL="91440" marR="91440"/>
+                </a:tc>
+                <a:tc>
+                  <a:txBody>
+                    <a:bodyPr vert="horz" wrap="square" lIns="91440" tIns="45720" rIns="91440" bIns="45720" anchor="t" anchorCtr="0">
+                      <a:spAutoFit/>
+                    </a:bodyPr>
+                    <a:p>
+                      <a:pPr>
+                        <a:defRPr/>
+                      </a:pPr>
+                      <a:r>
+                        <a:rPr lang="ko-KR" altLang="en-US">
+                          <a:solidFill>
+                            <a:srgbClr val="ff0000"/>
+                          </a:solidFill>
+                        </a:rPr>
+                        <a:t>밸런싱, 버그 수정</a:t>
+                      </a:r>
+                      <a:r>
+                        <a:rPr lang="en-US" altLang="ko-KR">
+                          <a:solidFill>
+                            <a:srgbClr val="ff0000"/>
+                          </a:solidFill>
+                        </a:rPr>
+                        <a:t>,</a:t>
+                      </a:r>
+                      <a:r>
+                        <a:rPr lang="ko-KR" altLang="en-US">
+                          <a:solidFill>
+                            <a:srgbClr val="ff0000"/>
+                          </a:solidFill>
+                        </a:rPr>
+                        <a:t> 사운드</a:t>
+                      </a:r>
+                      <a:endParaRPr lang="ko-KR" altLang="en-US">
+                        <a:solidFill>
+                          <a:srgbClr val="ff0000"/>
+                        </a:solidFill>
+                      </a:endParaRPr>
+                    </a:p>
+                  </a:txBody>
+                  <a:tcPr marL="91440" marR="91440"/>
+                </a:tc>
+              </a:tr>
+            </a:tbl>
+          </a:graphicData>
+        </a:graphic>
+      </p:graphicFrame>
+    </p:spTree>
+    <p:extLst>
+      <p:ext uri="{BB962C8B-B14F-4D97-AF65-F5344CB8AC3E}">
+        <p14:creationId xmlns:p14="http://schemas.microsoft.com/office/powerpoint/2010/main" val="2846423610"/>
+      </p:ext>
+    </p:extLst>
+  </p:cSld>
+  <p:clrMapOvr>
+    <a:masterClrMapping/>
+  </p:clrMapOvr>
+  <mc:AlternateContent xmlns:mc="http://schemas.openxmlformats.org/markup-compatibility/2006">
+    <mc:Choice xmlns:p14="http://schemas.microsoft.com/office/powerpoint/2010/main" Requires="p14">
+      <p:transition xmlns:mc="http://schemas.openxmlformats.org/markup-compatibility/2006" xmlns:p14="http://schemas.microsoft.com/office/powerpoint/2010/main" advTm="25531" mc:Ignorable="p14" p14:dur="500"/>
     </mc:Choice>
     <mc:Fallback>
       <p:transition/>
@@ -3385,7 +5328,7 @@
 </p:sld>
 </file>
 
-<file path=ppt/slides/slide3.xml><?xml version="1.0" encoding="utf-8"?>
+<file path=ppt/slides/slide4.xml><?xml version="1.0" encoding="utf-8"?>
 <p:sld xmlns:r="http://schemas.openxmlformats.org/officeDocument/2006/relationships" xmlns:c="http://schemas.openxmlformats.org/drawingml/2006/chart" xmlns:a="http://schemas.openxmlformats.org/drawingml/2006/main" xmlns:dgm="http://schemas.openxmlformats.org/drawingml/2006/diagram" xmlns:dsp="http://schemas.microsoft.com/office/drawing/2008/diagram" xmlns:p="http://schemas.openxmlformats.org/presentationml/2006/main">
   <p:cSld>
     <p:spTree>
@@ -3488,7 +5431,7 @@
   </p:clrMapOvr>
   <mc:AlternateContent xmlns:mc="http://schemas.openxmlformats.org/markup-compatibility/2006">
     <mc:Choice xmlns:p14="http://schemas.microsoft.com/office/powerpoint/2010/main" Requires="p14">
-      <p:transition xmlns:mc="http://schemas.openxmlformats.org/markup-compatibility/2006" xmlns:p14="http://schemas.microsoft.com/office/powerpoint/2010/main" mc:Ignorable="p14" p14:dur="500"/>
+      <p:transition xmlns:mc="http://schemas.openxmlformats.org/markup-compatibility/2006" xmlns:p14="http://schemas.microsoft.com/office/powerpoint/2010/main" advTm="4094" mc:Ignorable="p14" p14:dur="500"/>
     </mc:Choice>
     <mc:Fallback>
       <p:transition/>
